--- a/Aula03_Pensamento_Dedutivo/Aula03_Teoria.pptx
+++ b/Aula03_Pensamento_Dedutivo/Aula03_Teoria.pptx
@@ -2320,6 +2320,10 @@
           </a:solidFill>
           <a:ln/>
         </p:spPr>
+        <p:txBody>
+          <a:bodyPr/>
+          <a:p/>
+        </p:txBody>
       </p:sp>
       <p:sp>
         <p:nvSpPr>
@@ -2342,6 +2346,10 @@
           </a:solidFill>
           <a:ln/>
         </p:spPr>
+        <p:txBody>
+          <a:bodyPr/>
+          <a:p/>
+        </p:txBody>
       </p:sp>
       <p:sp>
         <p:nvSpPr>
@@ -2362,6 +2370,10 @@
           </a:solidFill>
           <a:ln/>
         </p:spPr>
+        <p:txBody>
+          <a:bodyPr/>
+          <a:p/>
+        </p:txBody>
       </p:sp>
       <p:pic>
         <p:nvPicPr>
@@ -2600,6 +2612,10 @@
           </a:solidFill>
           <a:ln/>
         </p:spPr>
+        <p:txBody>
+          <a:bodyPr/>
+          <a:p/>
+        </p:txBody>
       </p:sp>
       <p:sp>
         <p:nvSpPr>
@@ -2912,6 +2928,10 @@
             </a:outerShdw>
           </a:effectLst>
         </p:spPr>
+        <p:txBody>
+          <a:bodyPr/>
+          <a:p/>
+        </p:txBody>
       </p:sp>
       <p:sp>
         <p:nvSpPr>
@@ -3446,6 +3466,10 @@
             </a:outerShdw>
           </a:effectLst>
         </p:spPr>
+        <p:txBody>
+          <a:bodyPr/>
+          <a:p/>
+        </p:txBody>
       </p:sp>
       <p:sp>
         <p:nvSpPr>
@@ -3544,7 +3568,7 @@
                 <a:ea typeface="Calibri" pitchFamily="34" charset="-122"/>
                 <a:cs typeface="Calibri" pitchFamily="34" charset="-120"/>
               </a:rPr>
-              <a:t>Wessels: listas, tabelas e gráficos comunicam histórias diferentes dos dados.</a:t>
+              <a:t>Listas, tabelas e gráficos comunicam histórias diferentes dos dados.</a:t>
             </a:r>
             <a:endParaRPr lang="en-US" sz="1100" dirty="0"/>
           </a:p>
@@ -3565,7 +3589,7 @@
                 <a:ea typeface="Calibri" pitchFamily="34" charset="-122"/>
                 <a:cs typeface="Calibri" pitchFamily="34" charset="-120"/>
               </a:rPr>
-              <a:t>Queiroz: feedback visual/textual deve orientar interpretação, não apenas corrigir.</a:t>
+              <a:t>Feedback visual/textual deve orientar interpretação, não apenas corrigir.</a:t>
             </a:r>
             <a:endParaRPr lang="en-US" sz="1100" dirty="0"/>
           </a:p>
@@ -3586,7 +3610,7 @@
                 <a:ea typeface="Calibri" pitchFamily="34" charset="-122"/>
                 <a:cs typeface="Calibri" pitchFamily="34" charset="-120"/>
               </a:rPr>
-              <a:t>Relato: explicitar variáveis, relações e restrições.</a:t>
+              <a:t>Explicitar variáveis, relações e restrições.</a:t>
             </a:r>
             <a:endParaRPr lang="en-US" sz="1100" dirty="0"/>
           </a:p>
@@ -3620,6 +3644,10 @@
             </a:outerShdw>
           </a:effectLst>
         </p:spPr>
+        <p:txBody>
+          <a:bodyPr/>
+          <a:p/>
+        </p:txBody>
       </p:sp>
       <p:sp>
         <p:nvSpPr>
@@ -3854,6 +3882,10 @@
           </a:solidFill>
           <a:ln/>
         </p:spPr>
+        <p:txBody>
+          <a:bodyPr/>
+          <a:p/>
+        </p:txBody>
       </p:sp>
       <p:sp>
         <p:nvSpPr>
@@ -4166,6 +4198,10 @@
             </a:outerShdw>
           </a:effectLst>
         </p:spPr>
+        <p:txBody>
+          <a:bodyPr/>
+          <a:p/>
+        </p:txBody>
       </p:sp>
       <p:sp>
         <p:nvSpPr>
@@ -4668,6 +4704,10 @@
             </a:outerShdw>
           </a:effectLst>
         </p:spPr>
+        <p:txBody>
+          <a:bodyPr/>
+          <a:p/>
+        </p:txBody>
       </p:sp>
       <p:sp>
         <p:nvSpPr>
@@ -4766,7 +4806,7 @@
                 <a:ea typeface="Calibri" pitchFamily="34" charset="-122"/>
                 <a:cs typeface="Calibri" pitchFamily="34" charset="-120"/>
               </a:rPr>
-              <a:t>Wessels: transnumeração torna dados interpretáveis em nova forma.</a:t>
+              <a:t>Transnumeração torna dados interpretáveis em nova forma.</a:t>
             </a:r>
             <a:endParaRPr lang="en-US" sz="1100" dirty="0"/>
           </a:p>
@@ -4787,7 +4827,7 @@
                 <a:ea typeface="Calibri" pitchFamily="34" charset="-122"/>
                 <a:cs typeface="Calibri" pitchFamily="34" charset="-120"/>
               </a:rPr>
-              <a:t>Queiroz: múltiplas expressões exibem aspectos distintos do mesmo conceito.</a:t>
+              <a:t>Múltiplas expressões exibem aspectos distintos do mesmo conceito.</a:t>
             </a:r>
             <a:endParaRPr lang="en-US" sz="1100" dirty="0"/>
           </a:p>
@@ -4808,7 +4848,7 @@
                 <a:ea typeface="Calibri" pitchFamily="34" charset="-122"/>
                 <a:cs typeface="Calibri" pitchFamily="34" charset="-120"/>
               </a:rPr>
-              <a:t>Relato: articular código, texto, tabela, gráfico e interpretação.</a:t>
+              <a:t>Articular código, texto, tabela, gráfico e interpretação.</a:t>
             </a:r>
             <a:endParaRPr lang="en-US" sz="1100" dirty="0"/>
           </a:p>
@@ -4842,6 +4882,10 @@
             </a:outerShdw>
           </a:effectLst>
         </p:spPr>
+        <p:txBody>
+          <a:bodyPr/>
+          <a:p/>
+        </p:txBody>
       </p:sp>
       <p:sp>
         <p:nvSpPr>
@@ -5076,6 +5120,10 @@
           </a:solidFill>
           <a:ln/>
         </p:spPr>
+        <p:txBody>
+          <a:bodyPr/>
+          <a:p/>
+        </p:txBody>
       </p:sp>
       <p:sp>
         <p:nvSpPr>
@@ -5388,6 +5436,10 @@
             </a:outerShdw>
           </a:effectLst>
         </p:spPr>
+        <p:txBody>
+          <a:bodyPr/>
+          <a:p/>
+        </p:txBody>
       </p:sp>
       <p:sp>
         <p:nvSpPr>
@@ -5873,6 +5925,10 @@
             </a:outerShdw>
           </a:effectLst>
         </p:spPr>
+        <p:txBody>
+          <a:bodyPr/>
+          <a:p/>
+        </p:txBody>
       </p:sp>
       <p:sp>
         <p:nvSpPr>
@@ -5971,7 +6027,7 @@
                 <a:ea typeface="Calibri" pitchFamily="34" charset="-122"/>
                 <a:cs typeface="Calibri" pitchFamily="34" charset="-120"/>
               </a:rPr>
-              <a:t>Queiroz: a análise qualitativa observa invariantes e relações mobilizadas na ação.</a:t>
+              <a:t>A análise qualitativa observa invariantes e relações mobilizadas na ação.</a:t>
             </a:r>
             <a:endParaRPr lang="en-US" sz="1100" dirty="0"/>
           </a:p>
@@ -5992,7 +6048,7 @@
                 <a:ea typeface="Calibri" pitchFamily="34" charset="-122"/>
                 <a:cs typeface="Calibri" pitchFamily="34" charset="-120"/>
               </a:rPr>
-              <a:t>Relato: solicitar explicação do raciocínio desenvolvido.</a:t>
+              <a:t>Solicitar explicação do raciocínio desenvolvido.</a:t>
             </a:r>
             <a:endParaRPr lang="en-US" sz="1100" dirty="0"/>
           </a:p>
@@ -6013,7 +6069,7 @@
                 <a:ea typeface="Calibri" pitchFamily="34" charset="-122"/>
                 <a:cs typeface="Calibri" pitchFamily="34" charset="-120"/>
               </a:rPr>
-              <a:t>Wessels: níveis SOLO ajudam a observar respostas de menor a maior integração.</a:t>
+              <a:t>Níveis SOLO ajudam a observar respostas de menor a maior integração.</a:t>
             </a:r>
             <a:endParaRPr lang="en-US" sz="1100" dirty="0"/>
           </a:p>
@@ -6047,6 +6103,10 @@
             </a:outerShdw>
           </a:effectLst>
         </p:spPr>
+        <p:txBody>
+          <a:bodyPr/>
+          <a:p/>
+        </p:txBody>
       </p:sp>
       <p:sp>
         <p:nvSpPr>
@@ -6281,6 +6341,10 @@
           </a:solidFill>
           <a:ln/>
         </p:spPr>
+        <p:txBody>
+          <a:bodyPr/>
+          <a:p/>
+        </p:txBody>
       </p:sp>
       <p:sp>
         <p:nvSpPr>
@@ -6593,6 +6657,10 @@
             </a:outerShdw>
           </a:effectLst>
         </p:spPr>
+        <p:txBody>
+          <a:bodyPr/>
+          <a:p/>
+        </p:txBody>
       </p:sp>
       <p:sp>
         <p:nvSpPr>
@@ -7262,6 +7330,10 @@
             </a:outerShdw>
           </a:effectLst>
         </p:spPr>
+        <p:txBody>
+          <a:bodyPr/>
+          <a:p/>
+        </p:txBody>
       </p:sp>
       <p:sp>
         <p:nvSpPr>
@@ -7360,7 +7432,7 @@
                 <a:ea typeface="Calibri" pitchFamily="34" charset="-122"/>
                 <a:cs typeface="Calibri" pitchFamily="34" charset="-120"/>
               </a:rPr>
-              <a:t>Wessels: transnumeração torna dados interpretáveis em nova forma.</a:t>
+              <a:t>Transnumeração torna dados interpretáveis em nova forma.</a:t>
             </a:r>
             <a:endParaRPr lang="en-US" sz="1100" dirty="0"/>
           </a:p>
@@ -7381,7 +7453,7 @@
                 <a:ea typeface="Calibri" pitchFamily="34" charset="-122"/>
                 <a:cs typeface="Calibri" pitchFamily="34" charset="-120"/>
               </a:rPr>
-              <a:t>Queiroz: representações ampliam a percepção de propriedades e relações.</a:t>
+              <a:t>Representações ampliam a percepção de propriedades e relações.</a:t>
             </a:r>
             <a:endParaRPr lang="en-US" sz="1100" dirty="0"/>
           </a:p>
@@ -7402,7 +7474,7 @@
                 <a:ea typeface="Calibri" pitchFamily="34" charset="-122"/>
                 <a:cs typeface="Calibri" pitchFamily="34" charset="-120"/>
               </a:rPr>
-              <a:t>Relato: solicitar explicação do raciocínio desenvolvido.</a:t>
+              <a:t>Solicitar explicação do raciocínio desenvolvido.</a:t>
             </a:r>
             <a:endParaRPr lang="en-US" sz="1100" dirty="0"/>
           </a:p>
@@ -7436,6 +7508,10 @@
             </a:outerShdw>
           </a:effectLst>
         </p:spPr>
+        <p:txBody>
+          <a:bodyPr/>
+          <a:p/>
+        </p:txBody>
       </p:sp>
       <p:sp>
         <p:nvSpPr>
@@ -7670,6 +7746,10 @@
           </a:solidFill>
           <a:ln/>
         </p:spPr>
+        <p:txBody>
+          <a:bodyPr/>
+          <a:p/>
+        </p:txBody>
       </p:sp>
       <p:sp>
         <p:nvSpPr>
@@ -7982,6 +8062,10 @@
             </a:outerShdw>
           </a:effectLst>
         </p:spPr>
+        <p:txBody>
+          <a:bodyPr/>
+          <a:p/>
+        </p:txBody>
       </p:sp>
       <p:sp>
         <p:nvSpPr>
@@ -8654,6 +8738,10 @@
             </a:outerShdw>
           </a:effectLst>
         </p:spPr>
+        <p:txBody>
+          <a:bodyPr/>
+          <a:p/>
+        </p:txBody>
       </p:sp>
       <p:sp>
         <p:nvSpPr>
@@ -8752,7 +8840,7 @@
                 <a:ea typeface="Calibri" pitchFamily="34" charset="-122"/>
                 <a:cs typeface="Calibri" pitchFamily="34" charset="-120"/>
               </a:rPr>
-              <a:t>Relato: incluir revisão, depuração e reconstrução.</a:t>
+              <a:t>Incluir revisão, depuração e reconstrução.</a:t>
             </a:r>
             <a:endParaRPr lang="en-US" sz="1100" dirty="0"/>
           </a:p>
@@ -8773,7 +8861,7 @@
                 <a:ea typeface="Calibri" pitchFamily="34" charset="-122"/>
                 <a:cs typeface="Calibri" pitchFamily="34" charset="-120"/>
               </a:rPr>
-              <a:t>Queiroz: feedback visual/textual deve orientar interpretação, não apenas corrigir.</a:t>
+              <a:t>Feedback visual/textual deve orientar interpretação, não apenas corrigir.</a:t>
             </a:r>
             <a:endParaRPr lang="en-US" sz="1100" dirty="0"/>
           </a:p>
@@ -8794,7 +8882,7 @@
                 <a:ea typeface="Calibri" pitchFamily="34" charset="-122"/>
                 <a:cs typeface="Calibri" pitchFamily="34" charset="-120"/>
               </a:rPr>
-              <a:t>Wessels: atividades planejadas desenvolvem representação e pensamento de ordem superior.</a:t>
+              <a:t>Atividades planejadas desenvolvem representação e pensamento de ordem superior.</a:t>
             </a:r>
             <a:endParaRPr lang="en-US" sz="1100" dirty="0"/>
           </a:p>
@@ -8828,6 +8916,10 @@
             </a:outerShdw>
           </a:effectLst>
         </p:spPr>
+        <p:txBody>
+          <a:bodyPr/>
+          <a:p/>
+        </p:txBody>
       </p:sp>
       <p:sp>
         <p:nvSpPr>
@@ -9062,6 +9154,10 @@
           </a:solidFill>
           <a:ln/>
         </p:spPr>
+        <p:txBody>
+          <a:bodyPr/>
+          <a:p/>
+        </p:txBody>
       </p:sp>
       <p:sp>
         <p:nvSpPr>
@@ -9374,6 +9470,10 @@
             </a:outerShdw>
           </a:effectLst>
         </p:spPr>
+        <p:txBody>
+          <a:bodyPr/>
+          <a:p/>
+        </p:txBody>
       </p:sp>
       <p:sp>
         <p:nvSpPr>
@@ -9774,6 +9874,10 @@
             </a:outerShdw>
           </a:effectLst>
         </p:spPr>
+        <p:txBody>
+          <a:bodyPr/>
+          <a:p/>
+        </p:txBody>
       </p:sp>
       <p:sp>
         <p:nvSpPr>
@@ -9872,7 +9976,7 @@
                 <a:ea typeface="Calibri" pitchFamily="34" charset="-122"/>
                 <a:cs typeface="Calibri" pitchFamily="34" charset="-120"/>
               </a:rPr>
-              <a:t>Relato: reconhecer limites da ferramenta e do modelo.</a:t>
+              <a:t>Reconhecer limites da ferramenta e do modelo.</a:t>
             </a:r>
             <a:endParaRPr lang="en-US" sz="1100" dirty="0"/>
           </a:p>
@@ -9893,7 +9997,7 @@
                 <a:ea typeface="Calibri" pitchFamily="34" charset="-122"/>
                 <a:cs typeface="Calibri" pitchFamily="34" charset="-120"/>
               </a:rPr>
-              <a:t>Queiroz: a forma de representação influencia erros, antecipações e reorganizações.</a:t>
+              <a:t>A forma de representação influencia erros, antecipações e reorganizações.</a:t>
             </a:r>
             <a:endParaRPr lang="en-US" sz="1100" dirty="0"/>
           </a:p>
@@ -9914,7 +10018,7 @@
                 <a:ea typeface="Calibri" pitchFamily="34" charset="-122"/>
                 <a:cs typeface="Calibri" pitchFamily="34" charset="-120"/>
               </a:rPr>
-              <a:t>Wessels: o contexto e o tipo de dado influenciam a representação escolhida.</a:t>
+              <a:t>O contexto e o tipo de dado influenciam a representação escolhida.</a:t>
             </a:r>
             <a:endParaRPr lang="en-US" sz="1100" dirty="0"/>
           </a:p>
@@ -9948,6 +10052,10 @@
             </a:outerShdw>
           </a:effectLst>
         </p:spPr>
+        <p:txBody>
+          <a:bodyPr/>
+          <a:p/>
+        </p:txBody>
       </p:sp>
       <p:sp>
         <p:nvSpPr>
@@ -10182,6 +10290,10 @@
           </a:solidFill>
           <a:ln/>
         </p:spPr>
+        <p:txBody>
+          <a:bodyPr/>
+          <a:p/>
+        </p:txBody>
       </p:sp>
       <p:sp>
         <p:nvSpPr>
@@ -10494,6 +10606,10 @@
             </a:outerShdw>
           </a:effectLst>
         </p:spPr>
+        <p:txBody>
+          <a:bodyPr/>
+          <a:p/>
+        </p:txBody>
       </p:sp>
       <p:sp>
         <p:nvSpPr>
@@ -10871,6 +10987,10 @@
             </a:outerShdw>
           </a:effectLst>
         </p:spPr>
+        <p:txBody>
+          <a:bodyPr/>
+          <a:p/>
+        </p:txBody>
       </p:sp>
       <p:sp>
         <p:nvSpPr>
@@ -10969,7 +11089,7 @@
                 <a:ea typeface="Calibri" pitchFamily="34" charset="-122"/>
                 <a:cs typeface="Calibri" pitchFamily="34" charset="-120"/>
               </a:rPr>
-              <a:t>Wessels: níveis SOLO ajudam a observar respostas de menor a maior integração.</a:t>
+              <a:t>Níveis SOLO ajudam a observar respostas de menor a maior integração.</a:t>
             </a:r>
             <a:endParaRPr lang="en-US" sz="1100" dirty="0"/>
           </a:p>
@@ -10990,7 +11110,7 @@
                 <a:ea typeface="Calibri" pitchFamily="34" charset="-122"/>
                 <a:cs typeface="Calibri" pitchFamily="34" charset="-120"/>
               </a:rPr>
-              <a:t>Queiroz: o percurso da tarefa revela mudanças no discurso e na ação.</a:t>
+              <a:t>O percurso da tarefa revela mudanças no discurso e na ação.</a:t>
             </a:r>
             <a:endParaRPr lang="en-US" sz="1100" dirty="0"/>
           </a:p>
@@ -11011,7 +11131,7 @@
                 <a:ea typeface="Calibri" pitchFamily="34" charset="-122"/>
                 <a:cs typeface="Calibri" pitchFamily="34" charset="-120"/>
               </a:rPr>
-              <a:t>Relato: avaliar o percurso de pensamento, não apenas o código final.</a:t>
+              <a:t>Avaliar o percurso de pensamento, não apenas o código final.</a:t>
             </a:r>
             <a:endParaRPr lang="en-US" sz="1100" dirty="0"/>
           </a:p>
@@ -11045,6 +11165,10 @@
             </a:outerShdw>
           </a:effectLst>
         </p:spPr>
+        <p:txBody>
+          <a:bodyPr/>
+          <a:p/>
+        </p:txBody>
       </p:sp>
       <p:sp>
         <p:nvSpPr>
@@ -11281,6 +11405,10 @@
           </a:solidFill>
           <a:ln/>
         </p:spPr>
+        <p:txBody>
+          <a:bodyPr/>
+          <a:p/>
+        </p:txBody>
       </p:sp>
       <p:sp>
         <p:nvSpPr>
@@ -11303,6 +11431,10 @@
           </a:solidFill>
           <a:ln/>
         </p:spPr>
+        <p:txBody>
+          <a:bodyPr/>
+          <a:p/>
+        </p:txBody>
       </p:sp>
       <p:sp>
         <p:nvSpPr>
@@ -11404,6 +11536,10 @@
           </a:solidFill>
           <a:ln/>
         </p:spPr>
+        <p:txBody>
+          <a:bodyPr/>
+          <a:p/>
+        </p:txBody>
       </p:sp>
       <p:sp>
         <p:nvSpPr>
@@ -11505,6 +11641,10 @@
           </a:solidFill>
           <a:ln/>
         </p:spPr>
+        <p:txBody>
+          <a:bodyPr/>
+          <a:p/>
+        </p:txBody>
       </p:sp>
       <p:sp>
         <p:nvSpPr>
@@ -11608,6 +11748,10 @@
           </a:solidFill>
           <a:ln/>
         </p:spPr>
+        <p:txBody>
+          <a:bodyPr/>
+          <a:p/>
+        </p:txBody>
       </p:sp>
       <p:sp>
         <p:nvSpPr>
@@ -11628,6 +11772,10 @@
           </a:solidFill>
           <a:ln/>
         </p:spPr>
+        <p:txBody>
+          <a:bodyPr/>
+          <a:p/>
+        </p:txBody>
       </p:sp>
       <p:pic>
         <p:nvPicPr>
@@ -11899,6 +12047,10 @@
           </a:solidFill>
           <a:ln/>
         </p:spPr>
+        <p:txBody>
+          <a:bodyPr/>
+          <a:p/>
+        </p:txBody>
       </p:sp>
       <p:pic>
         <p:nvPicPr>
@@ -11987,6 +12139,10 @@
           </a:solidFill>
           <a:ln/>
         </p:spPr>
+        <p:txBody>
+          <a:bodyPr/>
+          <a:p/>
+        </p:txBody>
       </p:sp>
       <p:sp>
         <p:nvSpPr>
@@ -12060,6 +12216,10 @@
             </a:outerShdw>
           </a:effectLst>
         </p:spPr>
+        <p:txBody>
+          <a:bodyPr/>
+          <a:p/>
+        </p:txBody>
       </p:sp>
       <p:sp>
         <p:nvSpPr>
@@ -12399,6 +12559,10 @@
           </a:solidFill>
           <a:ln/>
         </p:spPr>
+        <p:txBody>
+          <a:bodyPr/>
+          <a:p/>
+        </p:txBody>
       </p:sp>
       <p:pic>
         <p:nvPicPr>
@@ -12499,6 +12663,10 @@
             </a:outerShdw>
           </a:effectLst>
         </p:spPr>
+        <p:txBody>
+          <a:bodyPr/>
+          <a:p/>
+        </p:txBody>
       </p:sp>
       <p:sp>
         <p:nvSpPr>
@@ -12636,6 +12804,10 @@
             </a:outerShdw>
           </a:effectLst>
         </p:spPr>
+        <p:txBody>
+          <a:bodyPr/>
+          <a:p/>
+        </p:txBody>
       </p:sp>
       <p:sp>
         <p:nvSpPr>
@@ -12950,6 +13122,10 @@
           </a:solidFill>
           <a:ln/>
         </p:spPr>
+        <p:txBody>
+          <a:bodyPr/>
+          <a:p/>
+        </p:txBody>
       </p:sp>
       <p:pic>
         <p:nvPicPr>
@@ -13050,6 +13226,10 @@
             </a:outerShdw>
           </a:effectLst>
         </p:spPr>
+        <p:txBody>
+          <a:bodyPr/>
+          <a:p/>
+        </p:txBody>
       </p:sp>
       <p:sp>
         <p:nvSpPr>
@@ -13187,6 +13367,10 @@
             </a:outerShdw>
           </a:effectLst>
         </p:spPr>
+        <p:txBody>
+          <a:bodyPr/>
+          <a:p/>
+        </p:txBody>
       </p:sp>
       <p:sp>
         <p:nvSpPr>
@@ -13501,6 +13685,10 @@
           </a:solidFill>
           <a:ln/>
         </p:spPr>
+        <p:txBody>
+          <a:bodyPr/>
+          <a:p/>
+        </p:txBody>
       </p:sp>
       <p:pic>
         <p:nvPicPr>
@@ -13601,6 +13789,10 @@
             </a:outerShdw>
           </a:effectLst>
         </p:spPr>
+        <p:txBody>
+          <a:bodyPr/>
+          <a:p/>
+        </p:txBody>
       </p:sp>
       <p:sp>
         <p:nvSpPr>
@@ -13717,6 +13909,10 @@
             </a:outerShdw>
           </a:effectLst>
         </p:spPr>
+        <p:txBody>
+          <a:bodyPr/>
+          <a:p/>
+        </p:txBody>
       </p:sp>
       <p:sp>
         <p:nvSpPr>
@@ -14012,6 +14208,10 @@
           </a:solidFill>
           <a:ln/>
         </p:spPr>
+        <p:txBody>
+          <a:bodyPr/>
+          <a:p/>
+        </p:txBody>
       </p:sp>
       <p:sp>
         <p:nvSpPr>
@@ -14122,6 +14322,10 @@
             </a:outerShdw>
           </a:effectLst>
         </p:spPr>
+        <p:txBody>
+          <a:bodyPr/>
+          <a:p/>
+        </p:txBody>
       </p:sp>
       <p:sp>
         <p:nvSpPr>
@@ -14417,6 +14621,10 @@
           </a:solidFill>
           <a:ln/>
         </p:spPr>
+        <p:txBody>
+          <a:bodyPr/>
+          <a:p/>
+        </p:txBody>
       </p:sp>
       <p:sp>
         <p:nvSpPr>
@@ -14729,6 +14937,10 @@
             </a:outerShdw>
           </a:effectLst>
         </p:spPr>
+        <p:txBody>
+          <a:bodyPr/>
+          <a:p/>
+        </p:txBody>
       </p:sp>
       <p:sp>
         <p:nvSpPr>
@@ -15109,6 +15321,10 @@
             </a:outerShdw>
           </a:effectLst>
         </p:spPr>
+        <p:txBody>
+          <a:bodyPr/>
+          <a:p/>
+        </p:txBody>
       </p:sp>
       <p:sp>
         <p:nvSpPr>
@@ -15207,7 +15423,7 @@
                 <a:ea typeface="Calibri" pitchFamily="34" charset="-122"/>
                 <a:cs typeface="Calibri" pitchFamily="34" charset="-120"/>
               </a:rPr>
-              <a:t>Queiroz: a análise qualitativa observa invariantes e relações mobilizadas na ação.</a:t>
+              <a:t>A análise qualitativa observa invariantes e relações mobilizadas na ação.</a:t>
             </a:r>
             <a:endParaRPr lang="en-US" sz="1100" dirty="0"/>
           </a:p>
@@ -15228,7 +15444,7 @@
                 <a:ea typeface="Calibri" pitchFamily="34" charset="-122"/>
                 <a:cs typeface="Calibri" pitchFamily="34" charset="-120"/>
               </a:rPr>
-              <a:t>Relato: solicitar explicação do raciocínio desenvolvido.</a:t>
+              <a:t>Solicitar explicação do raciocínio desenvolvido.</a:t>
             </a:r>
             <a:endParaRPr lang="en-US" sz="1100" dirty="0"/>
           </a:p>
@@ -15249,7 +15465,7 @@
                 <a:ea typeface="Calibri" pitchFamily="34" charset="-122"/>
                 <a:cs typeface="Calibri" pitchFamily="34" charset="-120"/>
               </a:rPr>
-              <a:t>Wessels: níveis SOLO ajudam a observar respostas de menor a maior integração.</a:t>
+              <a:t>Níveis SOLO ajudam a observar respostas de menor a maior integração.</a:t>
             </a:r>
             <a:endParaRPr lang="en-US" sz="1100" dirty="0"/>
           </a:p>
@@ -15283,6 +15499,10 @@
             </a:outerShdw>
           </a:effectLst>
         </p:spPr>
+        <p:txBody>
+          <a:bodyPr/>
+          <a:p/>
+        </p:txBody>
       </p:sp>
       <p:sp>
         <p:nvSpPr>
@@ -15517,6 +15737,10 @@
           </a:solidFill>
           <a:ln/>
         </p:spPr>
+        <p:txBody>
+          <a:bodyPr/>
+          <a:p/>
+        </p:txBody>
       </p:sp>
       <p:sp>
         <p:nvSpPr>
@@ -15829,6 +16053,10 @@
             </a:outerShdw>
           </a:effectLst>
         </p:spPr>
+        <p:txBody>
+          <a:bodyPr/>
+          <a:p/>
+        </p:txBody>
       </p:sp>
       <p:sp>
         <p:nvSpPr>
@@ -16294,6 +16522,10 @@
             </a:outerShdw>
           </a:effectLst>
         </p:spPr>
+        <p:txBody>
+          <a:bodyPr/>
+          <a:p/>
+        </p:txBody>
       </p:sp>
       <p:sp>
         <p:nvSpPr>
@@ -16392,7 +16624,7 @@
                 <a:ea typeface="Calibri" pitchFamily="34" charset="-122"/>
                 <a:cs typeface="Calibri" pitchFamily="34" charset="-120"/>
               </a:rPr>
-              <a:t>Wessels: múltiplas representações indicam modelagem mais bem-sucedida.</a:t>
+              <a:t>Múltiplas representações indicam modelagem mais bem-sucedida.</a:t>
             </a:r>
             <a:endParaRPr lang="en-US" sz="1100" dirty="0"/>
           </a:p>
@@ -16413,7 +16645,7 @@
                 <a:ea typeface="Calibri" pitchFamily="34" charset="-122"/>
                 <a:cs typeface="Calibri" pitchFamily="34" charset="-120"/>
               </a:rPr>
-              <a:t>Queiroz: o resultado final não esgota a aprendizagem do conceito.</a:t>
+              <a:t>O resultado final não esgota a aprendizagem do conceito.</a:t>
             </a:r>
             <a:endParaRPr lang="en-US" sz="1100" dirty="0"/>
           </a:p>
@@ -16434,7 +16666,7 @@
                 <a:ea typeface="Calibri" pitchFamily="34" charset="-122"/>
                 <a:cs typeface="Calibri" pitchFamily="34" charset="-120"/>
               </a:rPr>
-              <a:t>Relato: avaliar o percurso de pensamento, não apenas o código final.</a:t>
+              <a:t>Avaliar o percurso de pensamento, não apenas o código final.</a:t>
             </a:r>
             <a:endParaRPr lang="en-US" sz="1100" dirty="0"/>
           </a:p>
@@ -16468,6 +16700,10 @@
             </a:outerShdw>
           </a:effectLst>
         </p:spPr>
+        <p:txBody>
+          <a:bodyPr/>
+          <a:p/>
+        </p:txBody>
       </p:sp>
       <p:sp>
         <p:nvSpPr>
@@ -16702,6 +16938,10 @@
           </a:solidFill>
           <a:ln/>
         </p:spPr>
+        <p:txBody>
+          <a:bodyPr/>
+          <a:p/>
+        </p:txBody>
       </p:sp>
       <p:sp>
         <p:nvSpPr>
@@ -17014,6 +17254,10 @@
             </a:outerShdw>
           </a:effectLst>
         </p:spPr>
+        <p:txBody>
+          <a:bodyPr/>
+          <a:p/>
+        </p:txBody>
       </p:sp>
       <p:sp>
         <p:nvSpPr>
@@ -17431,6 +17675,10 @@
             </a:outerShdw>
           </a:effectLst>
         </p:spPr>
+        <p:txBody>
+          <a:bodyPr/>
+          <a:p/>
+        </p:txBody>
       </p:sp>
       <p:sp>
         <p:nvSpPr>
@@ -17529,7 +17777,7 @@
                 <a:ea typeface="Calibri" pitchFamily="34" charset="-122"/>
                 <a:cs typeface="Calibri" pitchFamily="34" charset="-120"/>
               </a:rPr>
-              <a:t>Queiroz: representações ampliam a percepção de propriedades e relações.</a:t>
+              <a:t>Representações ampliam a percepção de propriedades e relações.</a:t>
             </a:r>
             <a:endParaRPr lang="en-US" sz="1100" dirty="0"/>
           </a:p>
@@ -17550,7 +17798,7 @@
                 <a:ea typeface="Calibri" pitchFamily="34" charset="-122"/>
                 <a:cs typeface="Calibri" pitchFamily="34" charset="-120"/>
               </a:rPr>
-              <a:t>Relato: articular código, texto, tabela, gráfico e interpretação.</a:t>
+              <a:t>Articular código, texto, tabela, gráfico e interpretação.</a:t>
             </a:r>
             <a:endParaRPr lang="en-US" sz="1100" dirty="0"/>
           </a:p>
@@ -17571,7 +17819,7 @@
                 <a:ea typeface="Calibri" pitchFamily="34" charset="-122"/>
                 <a:cs typeface="Calibri" pitchFamily="34" charset="-120"/>
               </a:rPr>
-              <a:t>Wessels: o contexto e o tipo de dado influenciam a representação escolhida.</a:t>
+              <a:t>O contexto e o tipo de dado influenciam a representação escolhida.</a:t>
             </a:r>
             <a:endParaRPr lang="en-US" sz="1100" dirty="0"/>
           </a:p>
@@ -17605,6 +17853,10 @@
             </a:outerShdw>
           </a:effectLst>
         </p:spPr>
+        <p:txBody>
+          <a:bodyPr/>
+          <a:p/>
+        </p:txBody>
       </p:sp>
       <p:sp>
         <p:nvSpPr>
